--- a/media/resources/files/Onduktardyn_Orunduk_Maanisi_1234_gJRPNDl.pptx
+++ b/media/resources/files/Onduktardyn_Orunduk_Maanisi_1234_gJRPNDl.pptx
@@ -6825,7 +6825,7 @@
                 <a:ea typeface="+mn-ea"/>
                 <a:cs typeface="+mn-cs"/>
               </a:rPr>
-              <a:t>Турдуу пикирлер учун ыраазычылык билдиребиз.</a:t>
+              <a:t>Түрдүү пикирлер үчүн ыраазычылык билдиребиз.</a:t>
             </a:r>
           </a:p>
           <a:p>

--- a/media/resources/files/Onduktardyn_Orunduk_Maanisi_1234_gJRPNDl.pptx
+++ b/media/resources/files/Onduktardyn_Orunduk_Maanisi_1234_gJRPNDl.pptx
@@ -1599,7 +1599,7 @@
             <a:pPr algn="ctr"/>
             <a:r>
               <a:rPr lang="en-GB" sz="2800" dirty="0"/>
-              <a:t>83.257</a:t>
+              <a:t>83,257</a:t>
             </a:r>
           </a:p>
         </p:txBody>
@@ -1703,7 +1703,7 @@
           <a:p>
             <a:r>
               <a:rPr lang="en-GB" dirty="0"/>
-              <a:t>0.79  = </a:t>
+              <a:t>0,79  = </a:t>
             </a:r>
           </a:p>
         </p:txBody>
@@ -2050,7 +2050,7 @@
           <a:p>
             <a:r>
               <a:rPr lang="en-GB" dirty="0"/>
-              <a:t>0.836  = </a:t>
+              <a:t>0,836  = </a:t>
             </a:r>
           </a:p>
         </p:txBody>
@@ -2791,7 +2791,7 @@
             <a:pPr algn="ctr"/>
             <a:r>
               <a:rPr lang="en-GB" sz="2800" dirty="0"/>
-              <a:t>6.181</a:t>
+              <a:t>6,181</a:t>
             </a:r>
             <a:r>
               <a:rPr lang="en-GB" dirty="0"/>
@@ -2932,7 +2932,7 @@
             <a:pPr algn="ctr"/>
             <a:r>
               <a:rPr lang="en-GB" sz="2800" dirty="0"/>
-              <a:t>2.108</a:t>
+              <a:t>2,108</a:t>
             </a:r>
             <a:r>
               <a:rPr lang="en-GB" dirty="0"/>
@@ -2982,7 +2982,7 @@
           <a:p>
             <a:r>
               <a:rPr lang="ky-KG" dirty="0"/>
-              <a:t>жөнөкөйлөштүрүлгөн бөлчөгу катары көрсөт.</a:t>
+              <a:t>жөнөкөйлөштүрүлгөн бөлчөгү катары көрсөт.</a:t>
             </a:r>
             <a:endParaRPr lang="en-GB" dirty="0"/>
           </a:p>
@@ -3344,7 +3344,7 @@
             <a:pPr algn="ctr"/>
             <a:r>
               <a:rPr lang="en-GB" sz="2800" dirty="0"/>
-              <a:t>83.257</a:t>
+              <a:t>83,257</a:t>
             </a:r>
           </a:p>
         </p:txBody>
@@ -3470,7 +3470,7 @@
           <a:p>
             <a:r>
               <a:rPr lang="en-GB" dirty="0"/>
-              <a:t>0.79  = </a:t>
+              <a:t>0,79  = </a:t>
             </a:r>
           </a:p>
         </p:txBody>
@@ -3907,7 +3907,7 @@
           <a:p>
             <a:r>
               <a:rPr lang="en-GB" dirty="0"/>
-              <a:t>0.836  = </a:t>
+              <a:t>0,836  = </a:t>
             </a:r>
           </a:p>
         </p:txBody>
@@ -5550,7 +5550,7 @@
             <a:pPr algn="ctr"/>
             <a:r>
               <a:rPr lang="en-GB" sz="2800" dirty="0"/>
-              <a:t>6.181</a:t>
+              <a:t>6,181</a:t>
             </a:r>
             <a:r>
               <a:rPr lang="en-GB" dirty="0"/>
@@ -5691,7 +5691,7 @@
             <a:pPr algn="ctr"/>
             <a:r>
               <a:rPr lang="en-GB" sz="2800" dirty="0"/>
-              <a:t>2.108</a:t>
+              <a:t>2,108</a:t>
             </a:r>
             <a:r>
               <a:rPr lang="en-GB" dirty="0"/>
@@ -5786,7 +5786,7 @@
           <a:p>
             <a:r>
               <a:rPr lang="ky-KG" dirty="0"/>
-              <a:t>жөнөкөйлөштүрүлгөн бөлчөгу катары көрсөт.</a:t>
+              <a:t>жөнөкөйлөштүрүлгөн бөлчөгү катары көрсөт.</a:t>
             </a:r>
             <a:endParaRPr lang="en-GB" dirty="0"/>
           </a:p>
